--- a/Programacion II/Clases/Clase 3 - Pilas y colas/Presentacion.pptx
+++ b/Programacion II/Clases/Clase 3 - Pilas y colas/Presentacion.pptx
@@ -4512,7 +4512,7 @@
                 </a:solidFill>
                 <a:latin typeface="Calibri"/>
               </a:rPr>
-              <a:t>Entrega en ExamLab (examlab.lovable.app/app)</a:t>
+              <a:t>Entrega en ExamLab (https://examlab.lovable.app/)</a:t>
             </a:r>
             <a:r>
               <a:rPr sz="1600" b="0" i="0">
@@ -5116,7 +5116,7 @@
                 </a:solidFill>
                 <a:latin typeface="Calibri"/>
               </a:rPr>
-              <a:t>Entrega del taller en ExamLab (examlab.lovable.app/app) · domingo 23:59.</a:t>
+              <a:t>Entrega del taller en ExamLab (https://examlab.lovable.app/) · domingo 23:59.</a:t>
             </a:r>
           </a:p>
         </p:txBody>

--- a/Programacion II/Clases/Clase 3 - Pilas y colas/Presentacion.pptx
+++ b/Programacion II/Clases/Clase 3 - Pilas y colas/Presentacion.pptx
@@ -6816,22 +6816,6 @@
                 <a:latin typeface="Calibri"/>
               </a:rPr>
               <a:t>–   Un punto que confunde mucho: una cola no se recorre para buscar</a:t>
-            </a:r>
-          </a:p>
-          <a:p>
-            <a:pPr>
-              <a:spcAft>
-                <a:spcPts val="800"/>
-              </a:spcAft>
-            </a:pPr>
-            <a:r>
-              <a:rPr sz="1500" b="0" i="0">
-                <a:solidFill>
-                  <a:srgbClr val="333333"/>
-                </a:solidFill>
-                <a:latin typeface="Calibri"/>
-              </a:rPr>
-              <a:t>–   Error tipico del docente que no domina el tema: escribir Queue&lt;Turno&gt; sala = new Queue&lt;&gt;() y quedarse en blanco…</a:t>
             </a:r>
           </a:p>
         </p:txBody>

--- a/Programacion II/Clases/Clase 3 - Pilas y colas/Presentacion.pptx
+++ b/Programacion II/Clases/Clase 3 - Pilas y colas/Presentacion.pptx
@@ -4512,7 +4512,7 @@
                 </a:solidFill>
                 <a:latin typeface="Calibri"/>
               </a:rPr>
-              <a:t>Entrega en ExamLab (https://examlab.lovable.app/)</a:t>
+              <a:t>Entrega en ExamLab (https://uniaj.examlab.workers.dev/)</a:t>
             </a:r>
             <a:r>
               <a:rPr sz="1600" b="0" i="0">
@@ -5116,7 +5116,7 @@
                 </a:solidFill>
                 <a:latin typeface="Calibri"/>
               </a:rPr>
-              <a:t>Entrega del taller en ExamLab (https://examlab.lovable.app/) · domingo 23:59.</a:t>
+              <a:t>Entrega del taller en ExamLab (https://uniaj.examlab.workers.dev/) · domingo 23:59.</a:t>
             </a:r>
           </a:p>
         </p:txBody>

--- a/Programacion II/Clases/Clase 3 - Pilas y colas/Presentacion.pptx
+++ b/Programacion II/Clases/Clase 3 - Pilas y colas/Presentacion.pptx
@@ -8451,7 +8451,7 @@
         <p:spPr>
           <a:xfrm>
             <a:off x="457200" y="1234440"/>
-            <a:ext cx="11277295" cy="777240"/>
+            <a:ext cx="11277295" cy="950976"/>
           </a:xfrm>
           <a:prstGeom prst="roundRect">
             <a:avLst>
@@ -8495,7 +8495,7 @@
         </p:nvSpPr>
         <p:spPr>
           <a:xfrm>
-            <a:off x="594360" y="1403604"/>
+            <a:off x="594360" y="1490472"/>
             <a:ext cx="438912" cy="438912"/>
           </a:xfrm>
           <a:prstGeom prst="roundRect">
@@ -8540,7 +8540,7 @@
         </p:nvSpPr>
         <p:spPr>
           <a:xfrm>
-            <a:off x="594360" y="1403604"/>
+            <a:off x="594360" y="1490472"/>
             <a:ext cx="438912" cy="438912"/>
           </a:xfrm>
           <a:prstGeom prst="rect">
@@ -8574,7 +8574,7 @@
         <p:spPr>
           <a:xfrm>
             <a:off x="1188720" y="1325880"/>
-            <a:ext cx="10271455" cy="612647"/>
+            <a:ext cx="10271455" cy="786384"/>
           </a:xfrm>
           <a:prstGeom prst="rect">
             <a:avLst/>
@@ -8605,8 +8605,8 @@
         </p:nvSpPr>
         <p:spPr>
           <a:xfrm>
-            <a:off x="457200" y="2103120"/>
-            <a:ext cx="11277295" cy="777240"/>
+            <a:off x="457200" y="2276856"/>
+            <a:ext cx="11277295" cy="950976"/>
           </a:xfrm>
           <a:prstGeom prst="roundRect">
             <a:avLst>
@@ -8650,7 +8650,7 @@
         </p:nvSpPr>
         <p:spPr>
           <a:xfrm>
-            <a:off x="594360" y="2272284"/>
+            <a:off x="594360" y="2532888"/>
             <a:ext cx="438912" cy="438912"/>
           </a:xfrm>
           <a:prstGeom prst="roundRect">
@@ -8695,7 +8695,7 @@
         </p:nvSpPr>
         <p:spPr>
           <a:xfrm>
-            <a:off x="594360" y="2272284"/>
+            <a:off x="594360" y="2532888"/>
             <a:ext cx="438912" cy="438912"/>
           </a:xfrm>
           <a:prstGeom prst="rect">
@@ -8728,8 +8728,8 @@
         </p:nvSpPr>
         <p:spPr>
           <a:xfrm>
-            <a:off x="1188720" y="2194560"/>
-            <a:ext cx="10271455" cy="612647"/>
+            <a:off x="1188720" y="2368296"/>
+            <a:ext cx="10271455" cy="786384"/>
           </a:xfrm>
           <a:prstGeom prst="rect">
             <a:avLst/>
@@ -8760,8 +8760,8 @@
         </p:nvSpPr>
         <p:spPr>
           <a:xfrm>
-            <a:off x="457200" y="2971800"/>
-            <a:ext cx="11277295" cy="777240"/>
+            <a:off x="457200" y="3319272"/>
+            <a:ext cx="11277295" cy="950976"/>
           </a:xfrm>
           <a:prstGeom prst="roundRect">
             <a:avLst>
@@ -8805,7 +8805,7 @@
         </p:nvSpPr>
         <p:spPr>
           <a:xfrm>
-            <a:off x="594360" y="3140964"/>
+            <a:off x="594360" y="3575304"/>
             <a:ext cx="438912" cy="438912"/>
           </a:xfrm>
           <a:prstGeom prst="roundRect">
@@ -8850,7 +8850,7 @@
         </p:nvSpPr>
         <p:spPr>
           <a:xfrm>
-            <a:off x="594360" y="3140964"/>
+            <a:off x="594360" y="3575304"/>
             <a:ext cx="438912" cy="438912"/>
           </a:xfrm>
           <a:prstGeom prst="rect">
@@ -8883,8 +8883,8 @@
         </p:nvSpPr>
         <p:spPr>
           <a:xfrm>
-            <a:off x="1188720" y="3063240"/>
-            <a:ext cx="10271455" cy="612647"/>
+            <a:off x="1188720" y="3410712"/>
+            <a:ext cx="10271455" cy="786384"/>
           </a:xfrm>
           <a:prstGeom prst="rect">
             <a:avLst/>
@@ -8915,8 +8915,8 @@
         </p:nvSpPr>
         <p:spPr>
           <a:xfrm>
-            <a:off x="457200" y="3840479"/>
-            <a:ext cx="11277295" cy="777240"/>
+            <a:off x="457200" y="4361688"/>
+            <a:ext cx="11277295" cy="950976"/>
           </a:xfrm>
           <a:prstGeom prst="roundRect">
             <a:avLst>
@@ -8960,7 +8960,7 @@
         </p:nvSpPr>
         <p:spPr>
           <a:xfrm>
-            <a:off x="594360" y="4009643"/>
+            <a:off x="594360" y="4617720"/>
             <a:ext cx="438912" cy="438912"/>
           </a:xfrm>
           <a:prstGeom prst="roundRect">
@@ -9005,7 +9005,7 @@
         </p:nvSpPr>
         <p:spPr>
           <a:xfrm>
-            <a:off x="594360" y="4009643"/>
+            <a:off x="594360" y="4617720"/>
             <a:ext cx="438912" cy="438912"/>
           </a:xfrm>
           <a:prstGeom prst="rect">
@@ -9038,8 +9038,8 @@
         </p:nvSpPr>
         <p:spPr>
           <a:xfrm>
-            <a:off x="1188720" y="3931919"/>
-            <a:ext cx="10271455" cy="612647"/>
+            <a:off x="1188720" y="4453128"/>
+            <a:ext cx="10271455" cy="786384"/>
           </a:xfrm>
           <a:prstGeom prst="rect">
             <a:avLst/>
@@ -9070,8 +9070,8 @@
         </p:nvSpPr>
         <p:spPr>
           <a:xfrm>
-            <a:off x="457200" y="4709160"/>
-            <a:ext cx="11277295" cy="777240"/>
+            <a:off x="457200" y="5404104"/>
+            <a:ext cx="11277295" cy="950976"/>
           </a:xfrm>
           <a:prstGeom prst="roundRect">
             <a:avLst>
@@ -9115,7 +9115,7 @@
         </p:nvSpPr>
         <p:spPr>
           <a:xfrm>
-            <a:off x="594360" y="4878324"/>
+            <a:off x="594360" y="5660136"/>
             <a:ext cx="438912" cy="438912"/>
           </a:xfrm>
           <a:prstGeom prst="roundRect">
@@ -9160,7 +9160,7 @@
         </p:nvSpPr>
         <p:spPr>
           <a:xfrm>
-            <a:off x="594360" y="4878324"/>
+            <a:off x="594360" y="5660136"/>
             <a:ext cx="438912" cy="438912"/>
           </a:xfrm>
           <a:prstGeom prst="rect">
@@ -9193,8 +9193,8 @@
         </p:nvSpPr>
         <p:spPr>
           <a:xfrm>
-            <a:off x="1188720" y="4800600"/>
-            <a:ext cx="10271455" cy="612647"/>
+            <a:off x="1188720" y="5495544"/>
+            <a:ext cx="10271455" cy="786384"/>
           </a:xfrm>
           <a:prstGeom prst="rect">
             <a:avLst/>

--- a/Programacion II/Clases/Clase 3 - Pilas y colas/Presentacion.pptx
+++ b/Programacion II/Clases/Clase 3 - Pilas y colas/Presentacion.pptx
@@ -4327,7 +4327,7 @@
               </a:spcAft>
             </a:pPr>
             <a:r>
-              <a:rPr sz="1600" b="0" i="0">
+              <a:rPr sz="2000" b="0" i="0">
                 <a:solidFill>
                   <a:srgbClr val="333333"/>
                 </a:solidFill>
@@ -4336,7 +4336,7 @@
               <a:t>–   </a:t>
             </a:r>
             <a:r>
-              <a:rPr sz="1600" b="1" i="0">
+              <a:rPr sz="2000" b="1" i="0">
                 <a:solidFill>
                   <a:srgbClr val="333333"/>
                 </a:solidFill>
@@ -4345,7 +4345,7 @@
               <a:t>Entregable:</a:t>
             </a:r>
             <a:r>
-              <a:rPr sz="1600" b="0" i="0">
+              <a:rPr sz="2000" b="0" i="0">
                 <a:solidFill>
                   <a:srgbClr val="333333"/>
                 </a:solidFill>
@@ -4361,7 +4361,7 @@
               </a:spcAft>
             </a:pPr>
             <a:r>
-              <a:rPr sz="1600" b="0" i="0">
+              <a:rPr sz="2000" b="0" i="0">
                 <a:solidFill>
                   <a:srgbClr val="333333"/>
                 </a:solidFill>
@@ -4370,7 +4370,7 @@
               <a:t>–   </a:t>
             </a:r>
             <a:r>
-              <a:rPr sz="1600" b="1" i="0">
+              <a:rPr sz="2000" b="1" i="0">
                 <a:solidFill>
                   <a:srgbClr val="333333"/>
                 </a:solidFill>
@@ -4379,7 +4379,7 @@
               <a:t>Exito:</a:t>
             </a:r>
             <a:r>
-              <a:rPr sz="1600" b="0" i="0">
+              <a:rPr sz="2000" b="0" i="0">
                 <a:solidFill>
                   <a:srgbClr val="333333"/>
                 </a:solidFill>
@@ -4395,7 +4395,7 @@
               </a:spcAft>
             </a:pPr>
             <a:r>
-              <a:rPr sz="1600" b="0" i="0">
+              <a:rPr sz="2000" b="0" i="0">
                 <a:solidFill>
                   <a:srgbClr val="333333"/>
                 </a:solidFill>
@@ -4404,7 +4404,7 @@
               <a:t>–   </a:t>
             </a:r>
             <a:r>
-              <a:rPr sz="1600" b="1" i="0">
+              <a:rPr sz="2000" b="1" i="0">
                 <a:solidFill>
                   <a:srgbClr val="333333"/>
                 </a:solidFill>
@@ -4413,7 +4413,7 @@
               <a:t>Exito:</a:t>
             </a:r>
             <a:r>
-              <a:rPr sz="1600" b="0" i="0">
+              <a:rPr sz="2000" b="0" i="0">
                 <a:solidFill>
                   <a:srgbClr val="333333"/>
                 </a:solidFill>
@@ -4429,7 +4429,7 @@
               </a:spcAft>
             </a:pPr>
             <a:r>
-              <a:rPr sz="1600" b="0" i="0">
+              <a:rPr sz="2000" b="0" i="0">
                 <a:solidFill>
                   <a:srgbClr val="333333"/>
                 </a:solidFill>
@@ -4438,7 +4438,7 @@
               <a:t>–   </a:t>
             </a:r>
             <a:r>
-              <a:rPr sz="1600" b="1" i="0">
+              <a:rPr sz="2000" b="1" i="0">
                 <a:solidFill>
                   <a:srgbClr val="333333"/>
                 </a:solidFill>
@@ -4447,7 +4447,7 @@
               <a:t>Exito:</a:t>
             </a:r>
             <a:r>
-              <a:rPr sz="1600" b="0" i="0">
+              <a:rPr sz="2000" b="0" i="0">
                 <a:solidFill>
                   <a:srgbClr val="333333"/>
                 </a:solidFill>
@@ -4463,7 +4463,7 @@
               </a:spcAft>
             </a:pPr>
             <a:r>
-              <a:rPr sz="1600" b="0" i="0">
+              <a:rPr sz="2000" b="0" i="0">
                 <a:solidFill>
                   <a:srgbClr val="333333"/>
                 </a:solidFill>
@@ -4472,7 +4472,7 @@
               <a:t>–   </a:t>
             </a:r>
             <a:r>
-              <a:rPr sz="1600" b="1" i="0">
+              <a:rPr sz="2000" b="1" i="0">
                 <a:solidFill>
                   <a:srgbClr val="333333"/>
                 </a:solidFill>
@@ -4481,7 +4481,7 @@
               <a:t>Exito:</a:t>
             </a:r>
             <a:r>
-              <a:rPr sz="1600" b="0" i="0">
+              <a:rPr sz="2000" b="0" i="0">
                 <a:solidFill>
                   <a:srgbClr val="333333"/>
                 </a:solidFill>
@@ -4497,7 +4497,7 @@
               </a:spcAft>
             </a:pPr>
             <a:r>
-              <a:rPr sz="1600" b="0" i="0">
+              <a:rPr sz="2000" b="0" i="0">
                 <a:solidFill>
                   <a:srgbClr val="333333"/>
                 </a:solidFill>
@@ -4506,7 +4506,7 @@
               <a:t>–   </a:t>
             </a:r>
             <a:r>
-              <a:rPr sz="1600" b="1" i="0">
+              <a:rPr sz="2000" b="1" i="0">
                 <a:solidFill>
                   <a:srgbClr val="333333"/>
                 </a:solidFill>
@@ -4515,7 +4515,7 @@
               <a:t>Entrega en ExamLab (https://uniaj.examlab.workers.dev/)</a:t>
             </a:r>
             <a:r>
-              <a:rPr sz="1600" b="0" i="0">
+              <a:rPr sz="2000" b="0" i="0">
                 <a:solidFill>
                   <a:srgbClr val="333333"/>
                 </a:solidFill>
@@ -5562,7 +5562,7 @@
               </a:spcAft>
             </a:pPr>
             <a:r>
-              <a:rPr sz="1600" b="0" i="0">
+              <a:rPr sz="2000" b="0" i="0">
                 <a:solidFill>
                   <a:srgbClr val="333333"/>
                 </a:solidFill>
@@ -5571,7 +5571,7 @@
               <a:t>–   </a:t>
             </a:r>
             <a:r>
-              <a:rPr sz="1600" b="1" i="0">
+              <a:rPr sz="2000" b="1" i="0">
                 <a:solidFill>
                   <a:srgbClr val="333333"/>
                 </a:solidFill>
@@ -5580,7 +5580,7 @@
               <a:t>Hoy avanzamos VetCare en:</a:t>
             </a:r>
             <a:r>
-              <a:rPr sz="1600" b="0" i="0">
+              <a:rPr sz="2000" b="0" i="0">
                 <a:solidFill>
                   <a:srgbClr val="333333"/>
                 </a:solidFill>
@@ -5596,7 +5596,7 @@
               </a:spcAft>
             </a:pPr>
             <a:r>
-              <a:rPr sz="1600" b="0" i="0">
+              <a:rPr sz="2000" b="0" i="0">
                 <a:solidFill>
                   <a:srgbClr val="333333"/>
                 </a:solidFill>
@@ -5605,7 +5605,7 @@
               <a:t>–   Herramienta: </a:t>
             </a:r>
             <a:r>
-              <a:rPr sz="1600" b="1" i="0">
+              <a:rPr sz="2000" b="1" i="0">
                 <a:solidFill>
                   <a:srgbClr val="333333"/>
                 </a:solidFill>
@@ -5614,7 +5614,7 @@
               <a:t>Apache NetBeans</a:t>
             </a:r>
             <a:r>
-              <a:rPr sz="1600" b="0" i="0">
+              <a:rPr sz="2000" b="0" i="0">
                 <a:solidFill>
                   <a:srgbClr val="333333"/>
                 </a:solidFill>
@@ -5623,7 +5623,7 @@
               <a:t> · Bloque </a:t>
             </a:r>
             <a:r>
-              <a:rPr sz="1600" b="1" i="0">
+              <a:rPr sz="2000" b="1" i="0">
                 <a:solidFill>
                   <a:srgbClr val="333333"/>
                 </a:solidFill>
@@ -5639,7 +5639,7 @@
               </a:spcAft>
             </a:pPr>
             <a:r>
-              <a:rPr sz="1600" b="0" i="0">
+              <a:rPr sz="2000" b="0" i="0">
                 <a:solidFill>
                   <a:srgbClr val="333333"/>
                 </a:solidFill>
@@ -5648,7 +5648,7 @@
               <a:t>–   </a:t>
             </a:r>
             <a:r>
-              <a:rPr sz="1600" b="1" i="0">
+              <a:rPr sz="2000" b="1" i="0">
                 <a:solidFill>
                   <a:srgbClr val="333333"/>
                 </a:solidFill>
@@ -5657,7 +5657,7 @@
               <a:t>Entregable de hoy:</a:t>
             </a:r>
             <a:r>
-              <a:rPr sz="1600" b="0" i="0">
+              <a:rPr sz="2000" b="0" i="0">
                 <a:solidFill>
                   <a:srgbClr val="333333"/>
                 </a:solidFill>
@@ -5673,7 +5673,7 @@
               </a:spcAft>
             </a:pPr>
             <a:r>
-              <a:rPr sz="1600" b="0" i="0">
+              <a:rPr sz="2000" b="0" i="0">
                 <a:solidFill>
                   <a:srgbClr val="333333"/>
                 </a:solidFill>
@@ -5997,7 +5997,7 @@
         <p:spPr>
           <a:xfrm>
             <a:off x="502920" y="2587752"/>
-            <a:ext cx="2164019" cy="2560320"/>
+            <a:ext cx="2164019" cy="3310128"/>
           </a:xfrm>
           <a:prstGeom prst="rect">
             <a:avLst/>
@@ -6112,7 +6112,7 @@
         <p:spPr>
           <a:xfrm>
             <a:off x="2758379" y="2587752"/>
-            <a:ext cx="2164019" cy="2560320"/>
+            <a:ext cx="2164019" cy="3310128"/>
           </a:xfrm>
           <a:prstGeom prst="rect">
             <a:avLst/>
@@ -6227,7 +6227,7 @@
         <p:spPr>
           <a:xfrm>
             <a:off x="5013838" y="2587752"/>
-            <a:ext cx="2164019" cy="2560320"/>
+            <a:ext cx="2164019" cy="3310128"/>
           </a:xfrm>
           <a:prstGeom prst="rect">
             <a:avLst/>
@@ -6342,7 +6342,7 @@
         <p:spPr>
           <a:xfrm>
             <a:off x="7269297" y="2587752"/>
-            <a:ext cx="2164019" cy="2560320"/>
+            <a:ext cx="2164019" cy="3310128"/>
           </a:xfrm>
           <a:prstGeom prst="rect">
             <a:avLst/>
@@ -6457,7 +6457,7 @@
         <p:spPr>
           <a:xfrm>
             <a:off x="9524756" y="2587752"/>
-            <a:ext cx="2164019" cy="2560320"/>
+            <a:ext cx="2164019" cy="3310128"/>
           </a:xfrm>
           <a:prstGeom prst="rect">
             <a:avLst/>
@@ -6491,8 +6491,8 @@
         </p:nvSpPr>
         <p:spPr>
           <a:xfrm>
-            <a:off x="457200" y="5943600"/>
-            <a:ext cx="11277295" cy="365760"/>
+            <a:off x="457200" y="5806440"/>
+            <a:ext cx="11277295" cy="640080"/>
           </a:xfrm>
           <a:prstGeom prst="rect">
             <a:avLst/>
@@ -6745,7 +6745,7 @@
               </a:spcAft>
             </a:pPr>
             <a:r>
-              <a:rPr sz="1500" b="0" i="0">
+              <a:rPr sz="2000" b="0" i="0">
                 <a:solidFill>
                   <a:srgbClr val="333333"/>
                 </a:solidFill>
@@ -6761,7 +6761,7 @@
               </a:spcAft>
             </a:pPr>
             <a:r>
-              <a:rPr sz="1500" b="0" i="0">
+              <a:rPr sz="2000" b="0" i="0">
                 <a:solidFill>
                   <a:srgbClr val="333333"/>
                 </a:solidFill>
@@ -6777,7 +6777,7 @@
               </a:spcAft>
             </a:pPr>
             <a:r>
-              <a:rPr sz="1500" b="0" i="0">
+              <a:rPr sz="2000" b="0" i="0">
                 <a:solidFill>
                   <a:srgbClr val="333333"/>
                 </a:solidFill>
@@ -6793,7 +6793,7 @@
               </a:spcAft>
             </a:pPr>
             <a:r>
-              <a:rPr sz="1500" b="0" i="0">
+              <a:rPr sz="2000" b="0" i="0">
                 <a:solidFill>
                   <a:srgbClr val="333333"/>
                 </a:solidFill>
@@ -6809,7 +6809,7 @@
               </a:spcAft>
             </a:pPr>
             <a:r>
-              <a:rPr sz="1500" b="0" i="0">
+              <a:rPr sz="2000" b="0" i="0">
                 <a:solidFill>
                   <a:srgbClr val="333333"/>
                 </a:solidFill>
@@ -7145,11 +7145,11 @@
           <a:p>
             <a:pPr>
               <a:spcAft>
-                <a:spcPts val="400"/>
+                <a:spcPts val="342"/>
               </a:spcAft>
             </a:pPr>
             <a:r>
-              <a:rPr sz="1400" b="0" i="0">
+              <a:rPr sz="1200" b="0" i="0">
                 <a:solidFill>
                   <a:srgbClr val="FFFFFF"/>
                 </a:solidFill>
@@ -7161,11 +7161,11 @@
           <a:p>
             <a:pPr>
               <a:spcAft>
-                <a:spcPts val="400"/>
+                <a:spcPts val="342"/>
               </a:spcAft>
             </a:pPr>
             <a:r>
-              <a:rPr sz="1400" b="0" i="0">
+              <a:rPr sz="1200" b="0" i="0">
                 <a:solidFill>
                   <a:srgbClr val="FFFFFF"/>
                 </a:solidFill>
@@ -7177,11 +7177,11 @@
           <a:p>
             <a:pPr>
               <a:spcAft>
-                <a:spcPts val="400"/>
+                <a:spcPts val="342"/>
               </a:spcAft>
             </a:pPr>
             <a:r>
-              <a:rPr sz="1400" b="0" i="0">
+              <a:rPr sz="1200" b="0" i="0">
                 <a:solidFill>
                   <a:srgbClr val="FFFFFF"/>
                 </a:solidFill>
@@ -7193,11 +7193,11 @@
           <a:p>
             <a:pPr>
               <a:spcAft>
-                <a:spcPts val="400"/>
+                <a:spcPts val="342"/>
               </a:spcAft>
             </a:pPr>
             <a:r>
-              <a:rPr sz="1400" b="0" i="0">
+              <a:rPr sz="1200" b="0" i="0">
                 <a:solidFill>
                   <a:srgbClr val="FFFFFF"/>
                 </a:solidFill>
@@ -7209,11 +7209,11 @@
           <a:p>
             <a:pPr>
               <a:spcAft>
-                <a:spcPts val="400"/>
+                <a:spcPts val="342"/>
               </a:spcAft>
             </a:pPr>
             <a:r>
-              <a:rPr sz="1400" b="0" i="0">
+              <a:rPr sz="1200" b="0" i="0">
                 <a:solidFill>
                   <a:srgbClr val="FFFFFF"/>
                 </a:solidFill>
@@ -7225,11 +7225,11 @@
           <a:p>
             <a:pPr>
               <a:spcAft>
-                <a:spcPts val="400"/>
+                <a:spcPts val="342"/>
               </a:spcAft>
             </a:pPr>
             <a:r>
-              <a:rPr sz="1400" b="0" i="0">
+              <a:rPr sz="1200" b="0" i="0">
                 <a:solidFill>
                   <a:srgbClr val="FFFFFF"/>
                 </a:solidFill>
@@ -7241,11 +7241,11 @@
           <a:p>
             <a:pPr>
               <a:spcAft>
-                <a:spcPts val="400"/>
+                <a:spcPts val="342"/>
               </a:spcAft>
             </a:pPr>
             <a:r>
-              <a:rPr sz="1400" b="0" i="0">
+              <a:rPr sz="1200" b="0" i="0">
                 <a:solidFill>
                   <a:srgbClr val="FFFFFF"/>
                 </a:solidFill>
@@ -7257,11 +7257,11 @@
           <a:p>
             <a:pPr>
               <a:spcAft>
-                <a:spcPts val="400"/>
+                <a:spcPts val="342"/>
               </a:spcAft>
             </a:pPr>
             <a:r>
-              <a:rPr sz="1400" b="0" i="0">
+              <a:rPr sz="1200" b="0" i="0">
                 <a:solidFill>
                   <a:srgbClr val="FFFFFF"/>
                 </a:solidFill>
@@ -7273,11 +7273,11 @@
           <a:p>
             <a:pPr>
               <a:spcAft>
-                <a:spcPts val="400"/>
+                <a:spcPts val="342"/>
               </a:spcAft>
             </a:pPr>
             <a:r>
-              <a:rPr sz="1400" b="0" i="0">
+              <a:rPr sz="1200" b="0" i="0">
                 <a:solidFill>
                   <a:srgbClr val="FFFFFF"/>
                 </a:solidFill>
@@ -7289,11 +7289,11 @@
           <a:p>
             <a:pPr>
               <a:spcAft>
-                <a:spcPts val="400"/>
+                <a:spcPts val="342"/>
               </a:spcAft>
             </a:pPr>
             <a:r>
-              <a:rPr sz="1400" b="0" i="0">
+              <a:rPr sz="1200" b="0" i="0">
                 <a:solidFill>
                   <a:srgbClr val="FFFFFF"/>
                 </a:solidFill>
@@ -7305,11 +7305,11 @@
           <a:p>
             <a:pPr>
               <a:spcAft>
-                <a:spcPts val="400"/>
+                <a:spcPts val="342"/>
               </a:spcAft>
             </a:pPr>
             <a:r>
-              <a:rPr sz="1400" b="0" i="0">
+              <a:rPr sz="1200" b="0" i="0">
                 <a:solidFill>
                   <a:srgbClr val="FFFFFF"/>
                 </a:solidFill>
@@ -7321,11 +7321,11 @@
           <a:p>
             <a:pPr>
               <a:spcAft>
-                <a:spcPts val="400"/>
+                <a:spcPts val="342"/>
               </a:spcAft>
             </a:pPr>
             <a:r>
-              <a:rPr sz="1400" b="0" i="0">
+              <a:rPr sz="1200" b="0" i="0">
                 <a:solidFill>
                   <a:srgbClr val="FFFFFF"/>
                 </a:solidFill>
@@ -7337,11 +7337,11 @@
           <a:p>
             <a:pPr>
               <a:spcAft>
-                <a:spcPts val="400"/>
+                <a:spcPts val="342"/>
               </a:spcAft>
             </a:pPr>
             <a:r>
-              <a:rPr sz="1400" b="0" i="0">
+              <a:rPr sz="1200" b="0" i="0">
                 <a:solidFill>
                   <a:srgbClr val="FFFFFF"/>
                 </a:solidFill>
@@ -7353,11 +7353,11 @@
           <a:p>
             <a:pPr>
               <a:spcAft>
-                <a:spcPts val="400"/>
+                <a:spcPts val="342"/>
               </a:spcAft>
             </a:pPr>
             <a:r>
-              <a:rPr sz="1400" b="0" i="0">
+              <a:rPr sz="1200" b="0" i="0">
                 <a:solidFill>
                   <a:srgbClr val="FFFFFF"/>
                 </a:solidFill>
@@ -7369,11 +7369,11 @@
           <a:p>
             <a:pPr>
               <a:spcAft>
-                <a:spcPts val="400"/>
+                <a:spcPts val="342"/>
               </a:spcAft>
             </a:pPr>
             <a:r>
-              <a:rPr sz="1400" b="0" i="0">
+              <a:rPr sz="1200" b="0" i="0">
                 <a:solidFill>
                   <a:srgbClr val="FFFFFF"/>
                 </a:solidFill>
@@ -7385,11 +7385,11 @@
           <a:p>
             <a:pPr>
               <a:spcAft>
-                <a:spcPts val="400"/>
+                <a:spcPts val="342"/>
               </a:spcAft>
             </a:pPr>
             <a:r>
-              <a:rPr sz="1400" b="0" i="0">
+              <a:rPr sz="1200" b="0" i="0">
                 <a:solidFill>
                   <a:srgbClr val="FFFFFF"/>
                 </a:solidFill>
@@ -7401,11 +7401,11 @@
           <a:p>
             <a:pPr>
               <a:spcAft>
-                <a:spcPts val="400"/>
+                <a:spcPts val="342"/>
               </a:spcAft>
             </a:pPr>
             <a:r>
-              <a:rPr sz="1400" b="0" i="0">
+              <a:rPr sz="1200" b="0" i="0">
                 <a:solidFill>
                   <a:srgbClr val="FFFFFF"/>
                 </a:solidFill>
@@ -7660,7 +7660,7 @@
               </a:spcAft>
             </a:pPr>
             <a:r>
-              <a:rPr sz="1600" b="0" i="0">
+              <a:rPr sz="2000" b="0" i="0">
                 <a:solidFill>
                   <a:srgbClr val="333333"/>
                 </a:solidFill>
@@ -7669,7 +7669,7 @@
               <a:t>–   </a:t>
             </a:r>
             <a:r>
-              <a:rPr sz="1600" b="1" i="0">
+              <a:rPr sz="2000" b="1" i="0">
                 <a:solidFill>
                   <a:srgbClr val="333333"/>
                 </a:solidFill>
@@ -7678,7 +7678,7 @@
               <a:t>Herramienta:</a:t>
             </a:r>
             <a:r>
-              <a:rPr sz="1600" b="0" i="0">
+              <a:rPr sz="2000" b="0" i="0">
                 <a:solidFill>
                   <a:srgbClr val="333333"/>
                 </a:solidFill>
@@ -7694,7 +7694,7 @@
               </a:spcAft>
             </a:pPr>
             <a:r>
-              <a:rPr sz="1600" b="0" i="0">
+              <a:rPr sz="2000" b="0" i="0">
                 <a:solidFill>
                   <a:srgbClr val="333333"/>
                 </a:solidFill>
@@ -7703,7 +7703,7 @@
               <a:t>–   </a:t>
             </a:r>
             <a:r>
-              <a:rPr sz="1600" b="1" i="0">
+              <a:rPr sz="2000" b="1" i="0">
                 <a:solidFill>
                   <a:srgbClr val="333333"/>
                 </a:solidFill>
@@ -7712,7 +7712,7 @@
               <a:t>Demo:</a:t>
             </a:r>
             <a:r>
-              <a:rPr sz="1600" b="0" i="0">
+              <a:rPr sz="2000" b="0" i="0">
                 <a:solidFill>
                   <a:srgbClr val="333333"/>
                 </a:solidFill>
@@ -7728,7 +7728,7 @@
               </a:spcAft>
             </a:pPr>
             <a:r>
-              <a:rPr sz="1600" b="0" i="0">
+              <a:rPr sz="2000" b="0" i="0">
                 <a:solidFill>
                   <a:srgbClr val="333333"/>
                 </a:solidFill>
@@ -7948,7 +7948,7 @@
               </a:spcAft>
             </a:pPr>
             <a:r>
-              <a:rPr sz="1600" b="0" i="0">
+              <a:rPr sz="2000" b="0" i="0">
                 <a:solidFill>
                   <a:srgbClr val="333333"/>
                 </a:solidFill>
@@ -7957,7 +7957,7 @@
               <a:t>–   </a:t>
             </a:r>
             <a:r>
-              <a:rPr sz="1600" b="1" i="0">
+              <a:rPr sz="2000" b="1" i="0">
                 <a:solidFill>
                   <a:srgbClr val="333333"/>
                 </a:solidFill>
@@ -7966,7 +7966,7 @@
               <a:t>Por que importa al PI:</a:t>
             </a:r>
             <a:r>
-              <a:rPr sz="1600" b="0" i="0">
+              <a:rPr sz="2000" b="0" i="0">
                 <a:solidFill>
                   <a:srgbClr val="333333"/>
                 </a:solidFill>
@@ -7982,7 +7982,7 @@
               </a:spcAft>
             </a:pPr>
             <a:r>
-              <a:rPr sz="1600" b="0" i="0">
+              <a:rPr sz="2000" b="0" i="0">
                 <a:solidFill>
                   <a:srgbClr val="333333"/>
                 </a:solidFill>
@@ -7998,7 +7998,7 @@
               </a:spcAft>
             </a:pPr>
             <a:r>
-              <a:rPr sz="1600" b="0" i="0">
+              <a:rPr sz="2000" b="0" i="0">
                 <a:solidFill>
                   <a:srgbClr val="333333"/>
                 </a:solidFill>
@@ -8218,7 +8218,7 @@
               </a:spcAft>
             </a:pPr>
             <a:r>
-              <a:rPr sz="1600" b="0" i="0">
+              <a:rPr sz="2000" b="0" i="0">
                 <a:solidFill>
                   <a:srgbClr val="333333"/>
                 </a:solidFill>
@@ -8234,7 +8234,7 @@
               </a:spcAft>
             </a:pPr>
             <a:r>
-              <a:rPr sz="1600" b="0" i="0">
+              <a:rPr sz="2000" b="0" i="0">
                 <a:solidFill>
                   <a:srgbClr val="333333"/>
                 </a:solidFill>
@@ -8250,7 +8250,7 @@
               </a:spcAft>
             </a:pPr>
             <a:r>
-              <a:rPr sz="1600" b="0" i="0">
+              <a:rPr sz="2000" b="0" i="0">
                 <a:solidFill>
                   <a:srgbClr val="333333"/>
                 </a:solidFill>
@@ -8741,7 +8741,7 @@
           <a:lstStyle/>
           <a:p>
             <a:r>
-              <a:rPr sz="1500" b="1" i="0">
+              <a:rPr sz="1400" b="1" i="0">
                 <a:solidFill>
                   <a:srgbClr val="095292"/>
                 </a:solidFill>
@@ -8896,7 +8896,7 @@
           <a:lstStyle/>
           <a:p>
             <a:r>
-              <a:rPr sz="1500" b="1" i="0">
+              <a:rPr sz="1400" b="1" i="0">
                 <a:solidFill>
                   <a:srgbClr val="095292"/>
                 </a:solidFill>
@@ -9051,7 +9051,7 @@
           <a:lstStyle/>
           <a:p>
             <a:r>
-              <a:rPr sz="1500" b="1" i="0">
+              <a:rPr sz="1400" b="1" i="0">
                 <a:solidFill>
                   <a:srgbClr val="095292"/>
                 </a:solidFill>
@@ -9206,7 +9206,7 @@
           <a:lstStyle/>
           <a:p>
             <a:r>
-              <a:rPr sz="1500" b="1" i="0">
+              <a:rPr sz="1400" b="1" i="0">
                 <a:solidFill>
                   <a:srgbClr val="095292"/>
                 </a:solidFill>

--- a/Programacion II/Clases/Clase 3 - Pilas y colas/Presentacion.pptx
+++ b/Programacion II/Clases/Clase 3 - Pilas y colas/Presentacion.pptx
@@ -4351,7 +4351,7 @@
                 </a:solidFill>
                 <a:latin typeface="Calibri"/>
               </a:rPr>
-              <a:t> Clases SalaDeEspera (Queue) e HistorialReciente (Deque como pila) integradas al proyecto VetCare, con una demo que atiende en orden de llegada las cuatro mascotas del escenario y deshace la ultima atencion registrada; comprimido y subido a ExamLab.</a:t>
+              <a:t> Clases SalaDeEspera (Queue) e HistorialReciente (Deque como pila) integradas al proyecto VetCare, con una demo que atiende en orden de llegada las cuatro mascotas del escenario y deshace la ultima atencion registrada; comprimido y subido a la plataforma del curso.</a:t>
             </a:r>
           </a:p>
           <a:p>
@@ -4512,7 +4512,7 @@
                 </a:solidFill>
                 <a:latin typeface="Calibri"/>
               </a:rPr>
-              <a:t>Entrega en ExamLab (https://uniaj.examlab.workers.dev/)</a:t>
+              <a:t>Entrega en la plataforma del curso</a:t>
             </a:r>
             <a:r>
               <a:rPr sz="2000" b="0" i="0">
@@ -4521,7 +4521,7 @@
                 </a:solidFill>
                 <a:latin typeface="Calibri"/>
               </a:rPr>
-              <a:t> — domingo 23:59.</a:t>
+              <a:t> — en la fecha que indique el docente.</a:t>
             </a:r>
           </a:p>
         </p:txBody>
@@ -5116,7 +5116,7 @@
                 </a:solidFill>
                 <a:latin typeface="Calibri"/>
               </a:rPr>
-              <a:t>Entrega del taller en ExamLab (https://uniaj.examlab.workers.dev/) · domingo 23:59.</a:t>
+              <a:t>Entrega del taller, si el docente lo asigna · en la fecha que indique el docente.</a:t>
             </a:r>
           </a:p>
         </p:txBody>
@@ -5332,7 +5332,7 @@
                 </a:solidFill>
                 <a:latin typeface="Calibri"/>
               </a:rPr>
-              <a:t>Entregable: Clases SalaDeEspera (Queue) e HistorialReciente (Deque como pila) integradas al proyecto VetCare, con una demo que atiende en orden de llegada las cuatro mascotas del escenario y deshace la ultima atencion registrada; comprimido y subido a ExamLab.</a:t>
+              <a:t>Entregable: Clases SalaDeEspera (Queue) e HistorialReciente (Deque como pila) integradas al proyecto VetCare, con una demo que atiende en orden de llegada las cuatro mascotas del escenario y deshace la ultima atencion registrada; comprimido y subido a la plataforma del curso.</a:t>
             </a:r>
           </a:p>
           <a:p>
@@ -5611,7 +5611,7 @@
                 </a:solidFill>
                 <a:latin typeface="Calibri"/>
               </a:rPr>
-              <a:t>Apache NetBeans</a:t>
+              <a:t>Visual Studio Code (Java)</a:t>
             </a:r>
             <a:r>
               <a:rPr sz="2000" b="0" i="0">
@@ -5663,7 +5663,7 @@
                 </a:solidFill>
                 <a:latin typeface="Calibri"/>
               </a:rPr>
-              <a:t> Clases SalaDeEspera (Queue) e HistorialReciente (Deque como pila) integradas al proyecto VetCare, con una demo que atiende en orden de llegada las cuatro mascotas del escenario y deshace la ultima atencion registrada; comprimido y subido a ExamLab.</a:t>
+              <a:t> Clases SalaDeEspera (Queue) e HistorialReciente (Deque como pila) integradas al proyecto VetCare, con una demo que atiende en orden de llegada las cuatro mascotas del escenario y deshace la ultima atencion registrada; comprimido y subido a la plataforma del curso.</a:t>
             </a:r>
           </a:p>
           <a:p>
@@ -7684,7 +7684,7 @@
                 </a:solidFill>
                 <a:latin typeface="Calibri"/>
               </a:rPr>
-              <a:t> Apache NetBeans</a:t>
+              <a:t> Visual Studio Code (Java)</a:t>
             </a:r>
           </a:p>
           <a:p>
@@ -9212,7 +9212,7 @@
                 </a:solidFill>
                 <a:latin typeface="Calibri"/>
               </a:rPr>
-              <a:t>Conecte las dos estructuras en un main: cada vez que atender() saca un turno de la cola, registre automaticamente esa consulta en la pila; ejecute el flujo completo con las cuatro mascotas del escenario mas la urgencia de Canela agregada con addFirst sobre un Deque, capture la consola y suba el proyecto a ExamLab.</a:t>
+              <a:t>Conecte las dos estructuras en un main: cada vez que atender() saca un turno de la cola, registre automaticamente esa consulta en la pila; ejecute el flujo completo con las cuatro mascotas del escenario mas la urgencia de Canela agregada con addFirst sobre un Deque, capture la consola y suba el proyecto a la plataforma del curso.</a:t>
             </a:r>
           </a:p>
         </p:txBody>
